--- a/hmi/dev/pics/landscape.pptx
+++ b/hmi/dev/pics/landscape.pptx
@@ -7,12 +7,13 @@
   <p:sldIdLst>
     <p:sldId id="258" r:id="rId2"/>
     <p:sldId id="263" r:id="rId3"/>
-    <p:sldId id="261" r:id="rId4"/>
-    <p:sldId id="262" r:id="rId5"/>
-    <p:sldId id="259" r:id="rId6"/>
-    <p:sldId id="256" r:id="rId7"/>
-    <p:sldId id="257" r:id="rId8"/>
-    <p:sldId id="264" r:id="rId9"/>
+    <p:sldId id="265" r:id="rId4"/>
+    <p:sldId id="261" r:id="rId5"/>
+    <p:sldId id="262" r:id="rId6"/>
+    <p:sldId id="259" r:id="rId7"/>
+    <p:sldId id="256" r:id="rId8"/>
+    <p:sldId id="257" r:id="rId9"/>
+    <p:sldId id="264" r:id="rId10"/>
   </p:sldIdLst>
   <p:sldSz cx="4572000" cy="3048000"/>
   <p:notesSz cx="6858000" cy="9144000"/>
@@ -443,7 +444,7 @@
           <a:p>
             <a:fld id="{024B8AE9-66EA-4D6A-A8A7-9C9BEADD6B50}" type="datetimeFigureOut">
               <a:rPr lang="en-SE" smtClean="0"/>
-              <a:t>2026-04-12</a:t>
+              <a:t>2026-05-26</a:t>
             </a:fld>
             <a:endParaRPr lang="en-SE"/>
           </a:p>
@@ -613,7 +614,7 @@
           <a:p>
             <a:fld id="{024B8AE9-66EA-4D6A-A8A7-9C9BEADD6B50}" type="datetimeFigureOut">
               <a:rPr lang="en-SE" smtClean="0"/>
-              <a:t>2026-04-12</a:t>
+              <a:t>2026-05-26</a:t>
             </a:fld>
             <a:endParaRPr lang="en-SE"/>
           </a:p>
@@ -793,7 +794,7 @@
           <a:p>
             <a:fld id="{024B8AE9-66EA-4D6A-A8A7-9C9BEADD6B50}" type="datetimeFigureOut">
               <a:rPr lang="en-SE" smtClean="0"/>
-              <a:t>2026-04-12</a:t>
+              <a:t>2026-05-26</a:t>
             </a:fld>
             <a:endParaRPr lang="en-SE"/>
           </a:p>
@@ -963,7 +964,7 @@
           <a:p>
             <a:fld id="{024B8AE9-66EA-4D6A-A8A7-9C9BEADD6B50}" type="datetimeFigureOut">
               <a:rPr lang="en-SE" smtClean="0"/>
-              <a:t>2026-04-12</a:t>
+              <a:t>2026-05-26</a:t>
             </a:fld>
             <a:endParaRPr lang="en-SE"/>
           </a:p>
@@ -1207,7 +1208,7 @@
           <a:p>
             <a:fld id="{024B8AE9-66EA-4D6A-A8A7-9C9BEADD6B50}" type="datetimeFigureOut">
               <a:rPr lang="en-SE" smtClean="0"/>
-              <a:t>2026-04-12</a:t>
+              <a:t>2026-05-26</a:t>
             </a:fld>
             <a:endParaRPr lang="en-SE"/>
           </a:p>
@@ -1439,7 +1440,7 @@
           <a:p>
             <a:fld id="{024B8AE9-66EA-4D6A-A8A7-9C9BEADD6B50}" type="datetimeFigureOut">
               <a:rPr lang="en-SE" smtClean="0"/>
-              <a:t>2026-04-12</a:t>
+              <a:t>2026-05-26</a:t>
             </a:fld>
             <a:endParaRPr lang="en-SE"/>
           </a:p>
@@ -1806,7 +1807,7 @@
           <a:p>
             <a:fld id="{024B8AE9-66EA-4D6A-A8A7-9C9BEADD6B50}" type="datetimeFigureOut">
               <a:rPr lang="en-SE" smtClean="0"/>
-              <a:t>2026-04-12</a:t>
+              <a:t>2026-05-26</a:t>
             </a:fld>
             <a:endParaRPr lang="en-SE"/>
           </a:p>
@@ -1924,7 +1925,7 @@
           <a:p>
             <a:fld id="{024B8AE9-66EA-4D6A-A8A7-9C9BEADD6B50}" type="datetimeFigureOut">
               <a:rPr lang="en-SE" smtClean="0"/>
-              <a:t>2026-04-12</a:t>
+              <a:t>2026-05-26</a:t>
             </a:fld>
             <a:endParaRPr lang="en-SE"/>
           </a:p>
@@ -2019,7 +2020,7 @@
           <a:p>
             <a:fld id="{024B8AE9-66EA-4D6A-A8A7-9C9BEADD6B50}" type="datetimeFigureOut">
               <a:rPr lang="en-SE" smtClean="0"/>
-              <a:t>2026-04-12</a:t>
+              <a:t>2026-05-26</a:t>
             </a:fld>
             <a:endParaRPr lang="en-SE"/>
           </a:p>
@@ -2296,7 +2297,7 @@
           <a:p>
             <a:fld id="{024B8AE9-66EA-4D6A-A8A7-9C9BEADD6B50}" type="datetimeFigureOut">
               <a:rPr lang="en-SE" smtClean="0"/>
-              <a:t>2026-04-12</a:t>
+              <a:t>2026-05-26</a:t>
             </a:fld>
             <a:endParaRPr lang="en-SE"/>
           </a:p>
@@ -2553,7 +2554,7 @@
           <a:p>
             <a:fld id="{024B8AE9-66EA-4D6A-A8A7-9C9BEADD6B50}" type="datetimeFigureOut">
               <a:rPr lang="en-SE" smtClean="0"/>
-              <a:t>2026-04-12</a:t>
+              <a:t>2026-05-26</a:t>
             </a:fld>
             <a:endParaRPr lang="en-SE"/>
           </a:p>
@@ -2766,7 +2767,7 @@
           <a:p>
             <a:fld id="{024B8AE9-66EA-4D6A-A8A7-9C9BEADD6B50}" type="datetimeFigureOut">
               <a:rPr lang="en-SE" smtClean="0"/>
-              <a:t>2026-04-12</a:t>
+              <a:t>2026-05-26</a:t>
             </a:fld>
             <a:endParaRPr lang="en-SE"/>
           </a:p>
@@ -3293,6 +3294,114 @@
 </file>
 
 <file path=ppt/slides/slide3.xml><?xml version="1.0" encoding="utf-8"?>
+<p:sld xmlns:a="http://schemas.openxmlformats.org/drawingml/2006/main" xmlns:r="http://schemas.openxmlformats.org/officeDocument/2006/relationships" xmlns:p="http://schemas.openxmlformats.org/presentationml/2006/main">
+  <p:cSld>
+    <p:bg>
+      <p:bgPr>
+        <a:solidFill>
+          <a:schemeClr val="tx1"/>
+        </a:solidFill>
+        <a:effectLst/>
+      </p:bgPr>
+    </p:bg>
+    <p:spTree>
+      <p:nvGrpSpPr>
+        <p:cNvPr id="1" name=""/>
+        <p:cNvGrpSpPr/>
+        <p:nvPr/>
+      </p:nvGrpSpPr>
+      <p:grpSpPr>
+        <a:xfrm>
+          <a:off x="0" y="0"/>
+          <a:ext cx="0" cy="0"/>
+          <a:chOff x="0" y="0"/>
+          <a:chExt cx="0" cy="0"/>
+        </a:xfrm>
+      </p:grpSpPr>
+      <p:sp>
+        <p:nvSpPr>
+          <p:cNvPr id="2" name="Flowchart: Connector 1">
+            <a:extLst>
+              <a:ext uri="{FF2B5EF4-FFF2-40B4-BE49-F238E27FC236}">
+                <a16:creationId xmlns:a16="http://schemas.microsoft.com/office/drawing/2014/main" id="{9C7D3AB3-7A66-1F55-78AF-27EE469706A1}"/>
+              </a:ext>
+            </a:extLst>
+          </p:cNvPr>
+          <p:cNvSpPr/>
+          <p:nvPr/>
+        </p:nvSpPr>
+        <p:spPr>
+          <a:xfrm>
+            <a:off x="2286000" y="1524000"/>
+            <a:ext cx="3970020" cy="3665220"/>
+          </a:xfrm>
+          <a:prstGeom prst="flowChartConnector">
+            <a:avLst/>
+          </a:prstGeom>
+          <a:gradFill flip="none" rotWithShape="1">
+            <a:gsLst>
+              <a:gs pos="0">
+                <a:schemeClr val="tx1">
+                  <a:lumMod val="75000"/>
+                  <a:lumOff val="25000"/>
+                </a:schemeClr>
+              </a:gs>
+              <a:gs pos="100000">
+                <a:srgbClr val="020202"/>
+              </a:gs>
+            </a:gsLst>
+            <a:path path="circle">
+              <a:fillToRect l="100000" t="100000"/>
+            </a:path>
+            <a:tileRect r="-100000" b="-100000"/>
+          </a:gradFill>
+          <a:ln>
+            <a:solidFill>
+              <a:srgbClr val="3E3E3E">
+                <a:alpha val="50000"/>
+              </a:srgbClr>
+            </a:solidFill>
+          </a:ln>
+        </p:spPr>
+        <p:style>
+          <a:lnRef idx="2">
+            <a:schemeClr val="accent1">
+              <a:shade val="15000"/>
+            </a:schemeClr>
+          </a:lnRef>
+          <a:fillRef idx="1">
+            <a:schemeClr val="accent1"/>
+          </a:fillRef>
+          <a:effectRef idx="0">
+            <a:schemeClr val="accent1"/>
+          </a:effectRef>
+          <a:fontRef idx="minor">
+            <a:schemeClr val="lt1"/>
+          </a:fontRef>
+        </p:style>
+        <p:txBody>
+          <a:bodyPr rtlCol="0" anchor="ctr"/>
+          <a:lstStyle/>
+          <a:p>
+            <a:pPr algn="ctr"/>
+            <a:endParaRPr lang="en-SE"/>
+          </a:p>
+        </p:txBody>
+      </p:sp>
+    </p:spTree>
+    <p:extLst>
+      <p:ext uri="{BB962C8B-B14F-4D97-AF65-F5344CB8AC3E}">
+        <p14:creationId xmlns:p14="http://schemas.microsoft.com/office/powerpoint/2010/main" val="4154333544"/>
+      </p:ext>
+    </p:extLst>
+  </p:cSld>
+  <p:clrMapOvr>
+    <a:masterClrMapping/>
+  </p:clrMapOvr>
+</p:sld>
+</file>
+
+<file path=ppt/slides/slide4.xml><?xml version="1.0" encoding="utf-8"?>
 <p:sld xmlns:a="http://schemas.openxmlformats.org/drawingml/2006/main" xmlns:r="http://schemas.openxmlformats.org/officeDocument/2006/relationships" xmlns:p="http://schemas.openxmlformats.org/presentationml/2006/main">
   <p:cSld>
     <p:spTree>
@@ -3962,7 +4071,7 @@
 </p:sld>
 </file>
 
-<file path=ppt/slides/slide4.xml><?xml version="1.0" encoding="utf-8"?>
+<file path=ppt/slides/slide5.xml><?xml version="1.0" encoding="utf-8"?>
 <p:sld xmlns:a="http://schemas.openxmlformats.org/drawingml/2006/main" xmlns:r="http://schemas.openxmlformats.org/officeDocument/2006/relationships" xmlns:p="http://schemas.openxmlformats.org/presentationml/2006/main">
   <p:cSld>
     <p:spTree>
@@ -4289,7 +4398,7 @@
 </p:sld>
 </file>
 
-<file path=ppt/slides/slide5.xml><?xml version="1.0" encoding="utf-8"?>
+<file path=ppt/slides/slide6.xml><?xml version="1.0" encoding="utf-8"?>
 <p:sld xmlns:a="http://schemas.openxmlformats.org/drawingml/2006/main" xmlns:r="http://schemas.openxmlformats.org/officeDocument/2006/relationships" xmlns:p="http://schemas.openxmlformats.org/presentationml/2006/main">
   <p:cSld>
     <p:spTree>
@@ -4454,488 +4563,6 @@
     <p:extLst>
       <p:ext uri="{BB962C8B-B14F-4D97-AF65-F5344CB8AC3E}">
         <p14:creationId xmlns:p14="http://schemas.microsoft.com/office/powerpoint/2010/main" val="15377754"/>
-      </p:ext>
-    </p:extLst>
-  </p:cSld>
-  <p:clrMapOvr>
-    <a:masterClrMapping/>
-  </p:clrMapOvr>
-</p:sld>
-</file>
-
-<file path=ppt/slides/slide6.xml><?xml version="1.0" encoding="utf-8"?>
-<p:sld xmlns:a="http://schemas.openxmlformats.org/drawingml/2006/main" xmlns:r="http://schemas.openxmlformats.org/officeDocument/2006/relationships" xmlns:p="http://schemas.openxmlformats.org/presentationml/2006/main">
-  <p:cSld>
-    <p:spTree>
-      <p:nvGrpSpPr>
-        <p:cNvPr id="1" name=""/>
-        <p:cNvGrpSpPr/>
-        <p:nvPr/>
-      </p:nvGrpSpPr>
-      <p:grpSpPr>
-        <a:xfrm>
-          <a:off x="0" y="0"/>
-          <a:ext cx="0" cy="0"/>
-          <a:chOff x="0" y="0"/>
-          <a:chExt cx="0" cy="0"/>
-        </a:xfrm>
-      </p:grpSpPr>
-      <p:pic>
-        <p:nvPicPr>
-          <p:cNvPr id="5" name="Picture 4" descr="A colorful smoke on a black background&#10;&#10;Description automatically generated">
-            <a:extLst>
-              <a:ext uri="{FF2B5EF4-FFF2-40B4-BE49-F238E27FC236}">
-                <a16:creationId xmlns:a16="http://schemas.microsoft.com/office/drawing/2014/main" id="{8E6E834B-2239-3616-44F3-8EC913450BF3}"/>
-              </a:ext>
-            </a:extLst>
-          </p:cNvPr>
-          <p:cNvPicPr>
-            <a:picLocks noChangeAspect="1"/>
-          </p:cNvPicPr>
-          <p:nvPr/>
-        </p:nvPicPr>
-        <p:blipFill>
-          <a:blip r:embed="rId2">
-            <a:extLst>
-              <a:ext uri="{28A0092B-C50C-407E-A947-70E740481C1C}">
-                <a14:useLocalDpi xmlns:a14="http://schemas.microsoft.com/office/drawing/2010/main" val="0"/>
-              </a:ext>
-            </a:extLst>
-          </a:blip>
-          <a:stretch>
-            <a:fillRect/>
-          </a:stretch>
-        </p:blipFill>
-        <p:spPr>
-          <a:xfrm>
-            <a:off x="0" y="0"/>
-            <a:ext cx="4572000" cy="3048000"/>
-          </a:xfrm>
-          <a:prstGeom prst="rect">
-            <a:avLst/>
-          </a:prstGeom>
-        </p:spPr>
-      </p:pic>
-      <p:sp>
-        <p:nvSpPr>
-          <p:cNvPr id="8" name="Rectangle: Rounded Corners 7">
-            <a:extLst>
-              <a:ext uri="{FF2B5EF4-FFF2-40B4-BE49-F238E27FC236}">
-                <a16:creationId xmlns:a16="http://schemas.microsoft.com/office/drawing/2014/main" id="{3AA2A801-457E-87BC-3B72-3221D54F8E42}"/>
-              </a:ext>
-            </a:extLst>
-          </p:cNvPr>
-          <p:cNvSpPr/>
-          <p:nvPr/>
-        </p:nvSpPr>
-        <p:spPr>
-          <a:xfrm>
-            <a:off x="161925" y="428625"/>
-            <a:ext cx="920026" cy="914400"/>
-          </a:xfrm>
-          <a:prstGeom prst="roundRect">
-            <a:avLst/>
-          </a:prstGeom>
-          <a:solidFill>
-            <a:srgbClr val="2C2C2C"/>
-          </a:solidFill>
-          <a:ln>
-            <a:noFill/>
-          </a:ln>
-        </p:spPr>
-        <p:style>
-          <a:lnRef idx="2">
-            <a:schemeClr val="accent1">
-              <a:shade val="15000"/>
-            </a:schemeClr>
-          </a:lnRef>
-          <a:fillRef idx="1">
-            <a:schemeClr val="accent1"/>
-          </a:fillRef>
-          <a:effectRef idx="0">
-            <a:schemeClr val="accent1"/>
-          </a:effectRef>
-          <a:fontRef idx="minor">
-            <a:schemeClr val="lt1"/>
-          </a:fontRef>
-        </p:style>
-        <p:txBody>
-          <a:bodyPr rtlCol="0" anchor="ctr"/>
-          <a:lstStyle/>
-          <a:p>
-            <a:pPr algn="ctr"/>
-            <a:endParaRPr lang="en-SE"/>
-          </a:p>
-        </p:txBody>
-      </p:sp>
-      <p:sp>
-        <p:nvSpPr>
-          <p:cNvPr id="9" name="Rectangle: Rounded Corners 8">
-            <a:extLst>
-              <a:ext uri="{FF2B5EF4-FFF2-40B4-BE49-F238E27FC236}">
-                <a16:creationId xmlns:a16="http://schemas.microsoft.com/office/drawing/2014/main" id="{24DB2494-D161-11FB-FEF7-ED748EE3D1BC}"/>
-              </a:ext>
-            </a:extLst>
-          </p:cNvPr>
-          <p:cNvSpPr/>
-          <p:nvPr/>
-        </p:nvSpPr>
-        <p:spPr>
-          <a:xfrm>
-            <a:off x="1181100" y="428625"/>
-            <a:ext cx="920026" cy="914400"/>
-          </a:xfrm>
-          <a:prstGeom prst="roundRect">
-            <a:avLst/>
-          </a:prstGeom>
-          <a:solidFill>
-            <a:srgbClr val="2C2C2C"/>
-          </a:solidFill>
-          <a:ln>
-            <a:noFill/>
-          </a:ln>
-        </p:spPr>
-        <p:style>
-          <a:lnRef idx="2">
-            <a:schemeClr val="accent1">
-              <a:shade val="15000"/>
-            </a:schemeClr>
-          </a:lnRef>
-          <a:fillRef idx="1">
-            <a:schemeClr val="accent1"/>
-          </a:fillRef>
-          <a:effectRef idx="0">
-            <a:schemeClr val="accent1"/>
-          </a:effectRef>
-          <a:fontRef idx="minor">
-            <a:schemeClr val="lt1"/>
-          </a:fontRef>
-        </p:style>
-        <p:txBody>
-          <a:bodyPr rtlCol="0" anchor="ctr"/>
-          <a:lstStyle/>
-          <a:p>
-            <a:pPr algn="ctr"/>
-            <a:endParaRPr lang="en-SE"/>
-          </a:p>
-        </p:txBody>
-      </p:sp>
-      <p:sp>
-        <p:nvSpPr>
-          <p:cNvPr id="10" name="Rectangle: Rounded Corners 9">
-            <a:extLst>
-              <a:ext uri="{FF2B5EF4-FFF2-40B4-BE49-F238E27FC236}">
-                <a16:creationId xmlns:a16="http://schemas.microsoft.com/office/drawing/2014/main" id="{1CCC58E7-7282-FD56-E454-66C5E99F52F2}"/>
-              </a:ext>
-            </a:extLst>
-          </p:cNvPr>
-          <p:cNvSpPr/>
-          <p:nvPr/>
-        </p:nvSpPr>
-        <p:spPr>
-          <a:xfrm>
-            <a:off x="2200275" y="428625"/>
-            <a:ext cx="920026" cy="914400"/>
-          </a:xfrm>
-          <a:prstGeom prst="roundRect">
-            <a:avLst/>
-          </a:prstGeom>
-          <a:solidFill>
-            <a:srgbClr val="2C2C2C"/>
-          </a:solidFill>
-          <a:ln>
-            <a:noFill/>
-          </a:ln>
-        </p:spPr>
-        <p:style>
-          <a:lnRef idx="2">
-            <a:schemeClr val="accent1">
-              <a:shade val="15000"/>
-            </a:schemeClr>
-          </a:lnRef>
-          <a:fillRef idx="1">
-            <a:schemeClr val="accent1"/>
-          </a:fillRef>
-          <a:effectRef idx="0">
-            <a:schemeClr val="accent1"/>
-          </a:effectRef>
-          <a:fontRef idx="minor">
-            <a:schemeClr val="lt1"/>
-          </a:fontRef>
-        </p:style>
-        <p:txBody>
-          <a:bodyPr rtlCol="0" anchor="ctr"/>
-          <a:lstStyle/>
-          <a:p>
-            <a:pPr algn="ctr"/>
-            <a:endParaRPr lang="en-SE"/>
-          </a:p>
-        </p:txBody>
-      </p:sp>
-      <p:sp>
-        <p:nvSpPr>
-          <p:cNvPr id="11" name="Rectangle: Rounded Corners 10">
-            <a:extLst>
-              <a:ext uri="{FF2B5EF4-FFF2-40B4-BE49-F238E27FC236}">
-                <a16:creationId xmlns:a16="http://schemas.microsoft.com/office/drawing/2014/main" id="{47405F33-FD0F-47B3-2587-54459381EDD9}"/>
-              </a:ext>
-            </a:extLst>
-          </p:cNvPr>
-          <p:cNvSpPr/>
-          <p:nvPr/>
-        </p:nvSpPr>
-        <p:spPr>
-          <a:xfrm>
-            <a:off x="3219450" y="428625"/>
-            <a:ext cx="920026" cy="914400"/>
-          </a:xfrm>
-          <a:prstGeom prst="roundRect">
-            <a:avLst/>
-          </a:prstGeom>
-          <a:solidFill>
-            <a:srgbClr val="2C2C2C"/>
-          </a:solidFill>
-          <a:ln>
-            <a:noFill/>
-          </a:ln>
-        </p:spPr>
-        <p:style>
-          <a:lnRef idx="2">
-            <a:schemeClr val="accent1">
-              <a:shade val="15000"/>
-            </a:schemeClr>
-          </a:lnRef>
-          <a:fillRef idx="1">
-            <a:schemeClr val="accent1"/>
-          </a:fillRef>
-          <a:effectRef idx="0">
-            <a:schemeClr val="accent1"/>
-          </a:effectRef>
-          <a:fontRef idx="minor">
-            <a:schemeClr val="lt1"/>
-          </a:fontRef>
-        </p:style>
-        <p:txBody>
-          <a:bodyPr rtlCol="0" anchor="ctr"/>
-          <a:lstStyle/>
-          <a:p>
-            <a:pPr algn="ctr"/>
-            <a:endParaRPr lang="en-SE"/>
-          </a:p>
-        </p:txBody>
-      </p:sp>
-      <p:sp>
-        <p:nvSpPr>
-          <p:cNvPr id="12" name="Rectangle: Rounded Corners 11">
-            <a:extLst>
-              <a:ext uri="{FF2B5EF4-FFF2-40B4-BE49-F238E27FC236}">
-                <a16:creationId xmlns:a16="http://schemas.microsoft.com/office/drawing/2014/main" id="{AAFC7E33-D819-6F1F-C512-78769358B8F7}"/>
-              </a:ext>
-            </a:extLst>
-          </p:cNvPr>
-          <p:cNvSpPr/>
-          <p:nvPr/>
-        </p:nvSpPr>
-        <p:spPr>
-          <a:xfrm>
-            <a:off x="161925" y="1676400"/>
-            <a:ext cx="920026" cy="914400"/>
-          </a:xfrm>
-          <a:prstGeom prst="roundRect">
-            <a:avLst/>
-          </a:prstGeom>
-          <a:solidFill>
-            <a:srgbClr val="2C2C2C"/>
-          </a:solidFill>
-          <a:ln>
-            <a:noFill/>
-          </a:ln>
-        </p:spPr>
-        <p:style>
-          <a:lnRef idx="2">
-            <a:schemeClr val="accent1">
-              <a:shade val="15000"/>
-            </a:schemeClr>
-          </a:lnRef>
-          <a:fillRef idx="1">
-            <a:schemeClr val="accent1"/>
-          </a:fillRef>
-          <a:effectRef idx="0">
-            <a:schemeClr val="accent1"/>
-          </a:effectRef>
-          <a:fontRef idx="minor">
-            <a:schemeClr val="lt1"/>
-          </a:fontRef>
-        </p:style>
-        <p:txBody>
-          <a:bodyPr rtlCol="0" anchor="ctr"/>
-          <a:lstStyle/>
-          <a:p>
-            <a:pPr algn="ctr"/>
-            <a:endParaRPr lang="en-SE"/>
-          </a:p>
-        </p:txBody>
-      </p:sp>
-      <p:sp>
-        <p:nvSpPr>
-          <p:cNvPr id="13" name="Rectangle: Rounded Corners 12">
-            <a:extLst>
-              <a:ext uri="{FF2B5EF4-FFF2-40B4-BE49-F238E27FC236}">
-                <a16:creationId xmlns:a16="http://schemas.microsoft.com/office/drawing/2014/main" id="{1BEB1FCC-0605-CCB8-FCC2-F243BE81FE92}"/>
-              </a:ext>
-            </a:extLst>
-          </p:cNvPr>
-          <p:cNvSpPr/>
-          <p:nvPr/>
-        </p:nvSpPr>
-        <p:spPr>
-          <a:xfrm>
-            <a:off x="1181100" y="1676400"/>
-            <a:ext cx="920026" cy="914400"/>
-          </a:xfrm>
-          <a:prstGeom prst="roundRect">
-            <a:avLst/>
-          </a:prstGeom>
-          <a:solidFill>
-            <a:srgbClr val="2C2C2C"/>
-          </a:solidFill>
-          <a:ln>
-            <a:noFill/>
-          </a:ln>
-        </p:spPr>
-        <p:style>
-          <a:lnRef idx="2">
-            <a:schemeClr val="accent1">
-              <a:shade val="15000"/>
-            </a:schemeClr>
-          </a:lnRef>
-          <a:fillRef idx="1">
-            <a:schemeClr val="accent1"/>
-          </a:fillRef>
-          <a:effectRef idx="0">
-            <a:schemeClr val="accent1"/>
-          </a:effectRef>
-          <a:fontRef idx="minor">
-            <a:schemeClr val="lt1"/>
-          </a:fontRef>
-        </p:style>
-        <p:txBody>
-          <a:bodyPr rtlCol="0" anchor="ctr"/>
-          <a:lstStyle/>
-          <a:p>
-            <a:pPr algn="ctr"/>
-            <a:endParaRPr lang="en-SE"/>
-          </a:p>
-        </p:txBody>
-      </p:sp>
-      <p:sp>
-        <p:nvSpPr>
-          <p:cNvPr id="14" name="Rectangle: Rounded Corners 13">
-            <a:extLst>
-              <a:ext uri="{FF2B5EF4-FFF2-40B4-BE49-F238E27FC236}">
-                <a16:creationId xmlns:a16="http://schemas.microsoft.com/office/drawing/2014/main" id="{AD39C582-2955-B913-1E03-89D3A3C1A1C7}"/>
-              </a:ext>
-            </a:extLst>
-          </p:cNvPr>
-          <p:cNvSpPr/>
-          <p:nvPr/>
-        </p:nvSpPr>
-        <p:spPr>
-          <a:xfrm>
-            <a:off x="2200275" y="1676400"/>
-            <a:ext cx="920026" cy="914400"/>
-          </a:xfrm>
-          <a:prstGeom prst="roundRect">
-            <a:avLst/>
-          </a:prstGeom>
-          <a:solidFill>
-            <a:srgbClr val="2C2C2C"/>
-          </a:solidFill>
-          <a:ln>
-            <a:noFill/>
-          </a:ln>
-        </p:spPr>
-        <p:style>
-          <a:lnRef idx="2">
-            <a:schemeClr val="accent1">
-              <a:shade val="15000"/>
-            </a:schemeClr>
-          </a:lnRef>
-          <a:fillRef idx="1">
-            <a:schemeClr val="accent1"/>
-          </a:fillRef>
-          <a:effectRef idx="0">
-            <a:schemeClr val="accent1"/>
-          </a:effectRef>
-          <a:fontRef idx="minor">
-            <a:schemeClr val="lt1"/>
-          </a:fontRef>
-        </p:style>
-        <p:txBody>
-          <a:bodyPr rtlCol="0" anchor="ctr"/>
-          <a:lstStyle/>
-          <a:p>
-            <a:pPr algn="ctr"/>
-            <a:endParaRPr lang="en-SE"/>
-          </a:p>
-        </p:txBody>
-      </p:sp>
-      <p:sp>
-        <p:nvSpPr>
-          <p:cNvPr id="15" name="Rectangle: Rounded Corners 14">
-            <a:extLst>
-              <a:ext uri="{FF2B5EF4-FFF2-40B4-BE49-F238E27FC236}">
-                <a16:creationId xmlns:a16="http://schemas.microsoft.com/office/drawing/2014/main" id="{7CF83176-637F-0E98-B9D6-2E62DA2474F1}"/>
-              </a:ext>
-            </a:extLst>
-          </p:cNvPr>
-          <p:cNvSpPr/>
-          <p:nvPr/>
-        </p:nvSpPr>
-        <p:spPr>
-          <a:xfrm>
-            <a:off x="3219450" y="1676400"/>
-            <a:ext cx="920026" cy="914400"/>
-          </a:xfrm>
-          <a:prstGeom prst="roundRect">
-            <a:avLst/>
-          </a:prstGeom>
-          <a:solidFill>
-            <a:srgbClr val="2C2C2C"/>
-          </a:solidFill>
-          <a:ln>
-            <a:noFill/>
-          </a:ln>
-        </p:spPr>
-        <p:style>
-          <a:lnRef idx="2">
-            <a:schemeClr val="accent1">
-              <a:shade val="15000"/>
-            </a:schemeClr>
-          </a:lnRef>
-          <a:fillRef idx="1">
-            <a:schemeClr val="accent1"/>
-          </a:fillRef>
-          <a:effectRef idx="0">
-            <a:schemeClr val="accent1"/>
-          </a:effectRef>
-          <a:fontRef idx="minor">
-            <a:schemeClr val="lt1"/>
-          </a:fontRef>
-        </p:style>
-        <p:txBody>
-          <a:bodyPr rtlCol="0" anchor="ctr"/>
-          <a:lstStyle/>
-          <a:p>
-            <a:pPr algn="ctr"/>
-            <a:endParaRPr lang="en-SE"/>
-          </a:p>
-        </p:txBody>
-      </p:sp>
-    </p:spTree>
-    <p:extLst>
-      <p:ext uri="{BB962C8B-B14F-4D97-AF65-F5344CB8AC3E}">
-        <p14:creationId xmlns:p14="http://schemas.microsoft.com/office/powerpoint/2010/main" val="2478264824"/>
       </p:ext>
     </p:extLst>
   </p:cSld>
@@ -5019,7 +4646,7 @@
             <a:avLst/>
           </a:prstGeom>
           <a:solidFill>
-            <a:srgbClr val="FFFFFF"/>
+            <a:srgbClr val="2C2C2C"/>
           </a:solidFill>
           <a:ln>
             <a:noFill/>
@@ -5071,7 +4698,7 @@
             <a:avLst/>
           </a:prstGeom>
           <a:solidFill>
-            <a:srgbClr val="FFFFFF"/>
+            <a:srgbClr val="2C2C2C"/>
           </a:solidFill>
           <a:ln>
             <a:noFill/>
@@ -5123,7 +4750,7 @@
             <a:avLst/>
           </a:prstGeom>
           <a:solidFill>
-            <a:srgbClr val="FFFFFF"/>
+            <a:srgbClr val="2C2C2C"/>
           </a:solidFill>
           <a:ln>
             <a:noFill/>
@@ -5175,7 +4802,7 @@
             <a:avLst/>
           </a:prstGeom>
           <a:solidFill>
-            <a:srgbClr val="FFFFFF"/>
+            <a:srgbClr val="2C2C2C"/>
           </a:solidFill>
           <a:ln>
             <a:noFill/>
@@ -5227,7 +4854,7 @@
             <a:avLst/>
           </a:prstGeom>
           <a:solidFill>
-            <a:srgbClr val="FFFFFF"/>
+            <a:srgbClr val="2C2C2C"/>
           </a:solidFill>
           <a:ln>
             <a:noFill/>
@@ -5279,7 +4906,7 @@
             <a:avLst/>
           </a:prstGeom>
           <a:solidFill>
-            <a:srgbClr val="FFFFFF"/>
+            <a:srgbClr val="2C2C2C"/>
           </a:solidFill>
           <a:ln>
             <a:noFill/>
@@ -5331,7 +4958,7 @@
             <a:avLst/>
           </a:prstGeom>
           <a:solidFill>
-            <a:srgbClr val="FFFFFF"/>
+            <a:srgbClr val="2C2C2C"/>
           </a:solidFill>
           <a:ln>
             <a:noFill/>
@@ -5383,7 +5010,7 @@
             <a:avLst/>
           </a:prstGeom>
           <a:solidFill>
-            <a:srgbClr val="FFFFFF"/>
+            <a:srgbClr val="2C2C2C"/>
           </a:solidFill>
           <a:ln>
             <a:noFill/>
@@ -5417,6 +5044,488 @@
     </p:spTree>
     <p:extLst>
       <p:ext uri="{BB962C8B-B14F-4D97-AF65-F5344CB8AC3E}">
+        <p14:creationId xmlns:p14="http://schemas.microsoft.com/office/powerpoint/2010/main" val="2478264824"/>
+      </p:ext>
+    </p:extLst>
+  </p:cSld>
+  <p:clrMapOvr>
+    <a:masterClrMapping/>
+  </p:clrMapOvr>
+</p:sld>
+</file>
+
+<file path=ppt/slides/slide8.xml><?xml version="1.0" encoding="utf-8"?>
+<p:sld xmlns:a="http://schemas.openxmlformats.org/drawingml/2006/main" xmlns:r="http://schemas.openxmlformats.org/officeDocument/2006/relationships" xmlns:p="http://schemas.openxmlformats.org/presentationml/2006/main">
+  <p:cSld>
+    <p:spTree>
+      <p:nvGrpSpPr>
+        <p:cNvPr id="1" name=""/>
+        <p:cNvGrpSpPr/>
+        <p:nvPr/>
+      </p:nvGrpSpPr>
+      <p:grpSpPr>
+        <a:xfrm>
+          <a:off x="0" y="0"/>
+          <a:ext cx="0" cy="0"/>
+          <a:chOff x="0" y="0"/>
+          <a:chExt cx="0" cy="0"/>
+        </a:xfrm>
+      </p:grpSpPr>
+      <p:pic>
+        <p:nvPicPr>
+          <p:cNvPr id="5" name="Picture 4" descr="A colorful smoke on a black background&#10;&#10;Description automatically generated">
+            <a:extLst>
+              <a:ext uri="{FF2B5EF4-FFF2-40B4-BE49-F238E27FC236}">
+                <a16:creationId xmlns:a16="http://schemas.microsoft.com/office/drawing/2014/main" id="{8E6E834B-2239-3616-44F3-8EC913450BF3}"/>
+              </a:ext>
+            </a:extLst>
+          </p:cNvPr>
+          <p:cNvPicPr>
+            <a:picLocks noChangeAspect="1"/>
+          </p:cNvPicPr>
+          <p:nvPr/>
+        </p:nvPicPr>
+        <p:blipFill>
+          <a:blip r:embed="rId2">
+            <a:extLst>
+              <a:ext uri="{28A0092B-C50C-407E-A947-70E740481C1C}">
+                <a14:useLocalDpi xmlns:a14="http://schemas.microsoft.com/office/drawing/2010/main" val="0"/>
+              </a:ext>
+            </a:extLst>
+          </a:blip>
+          <a:stretch>
+            <a:fillRect/>
+          </a:stretch>
+        </p:blipFill>
+        <p:spPr>
+          <a:xfrm>
+            <a:off x="0" y="0"/>
+            <a:ext cx="4572000" cy="3048000"/>
+          </a:xfrm>
+          <a:prstGeom prst="rect">
+            <a:avLst/>
+          </a:prstGeom>
+        </p:spPr>
+      </p:pic>
+      <p:sp>
+        <p:nvSpPr>
+          <p:cNvPr id="8" name="Rectangle: Rounded Corners 7">
+            <a:extLst>
+              <a:ext uri="{FF2B5EF4-FFF2-40B4-BE49-F238E27FC236}">
+                <a16:creationId xmlns:a16="http://schemas.microsoft.com/office/drawing/2014/main" id="{3AA2A801-457E-87BC-3B72-3221D54F8E42}"/>
+              </a:ext>
+            </a:extLst>
+          </p:cNvPr>
+          <p:cNvSpPr/>
+          <p:nvPr/>
+        </p:nvSpPr>
+        <p:spPr>
+          <a:xfrm>
+            <a:off x="161925" y="428625"/>
+            <a:ext cx="920026" cy="914400"/>
+          </a:xfrm>
+          <a:prstGeom prst="roundRect">
+            <a:avLst/>
+          </a:prstGeom>
+          <a:solidFill>
+            <a:srgbClr val="FFFFFF"/>
+          </a:solidFill>
+          <a:ln>
+            <a:noFill/>
+          </a:ln>
+        </p:spPr>
+        <p:style>
+          <a:lnRef idx="2">
+            <a:schemeClr val="accent1">
+              <a:shade val="15000"/>
+            </a:schemeClr>
+          </a:lnRef>
+          <a:fillRef idx="1">
+            <a:schemeClr val="accent1"/>
+          </a:fillRef>
+          <a:effectRef idx="0">
+            <a:schemeClr val="accent1"/>
+          </a:effectRef>
+          <a:fontRef idx="minor">
+            <a:schemeClr val="lt1"/>
+          </a:fontRef>
+        </p:style>
+        <p:txBody>
+          <a:bodyPr rtlCol="0" anchor="ctr"/>
+          <a:lstStyle/>
+          <a:p>
+            <a:pPr algn="ctr"/>
+            <a:endParaRPr lang="en-SE"/>
+          </a:p>
+        </p:txBody>
+      </p:sp>
+      <p:sp>
+        <p:nvSpPr>
+          <p:cNvPr id="9" name="Rectangle: Rounded Corners 8">
+            <a:extLst>
+              <a:ext uri="{FF2B5EF4-FFF2-40B4-BE49-F238E27FC236}">
+                <a16:creationId xmlns:a16="http://schemas.microsoft.com/office/drawing/2014/main" id="{24DB2494-D161-11FB-FEF7-ED748EE3D1BC}"/>
+              </a:ext>
+            </a:extLst>
+          </p:cNvPr>
+          <p:cNvSpPr/>
+          <p:nvPr/>
+        </p:nvSpPr>
+        <p:spPr>
+          <a:xfrm>
+            <a:off x="1181100" y="428625"/>
+            <a:ext cx="920026" cy="914400"/>
+          </a:xfrm>
+          <a:prstGeom prst="roundRect">
+            <a:avLst/>
+          </a:prstGeom>
+          <a:solidFill>
+            <a:srgbClr val="FFFFFF"/>
+          </a:solidFill>
+          <a:ln>
+            <a:noFill/>
+          </a:ln>
+        </p:spPr>
+        <p:style>
+          <a:lnRef idx="2">
+            <a:schemeClr val="accent1">
+              <a:shade val="15000"/>
+            </a:schemeClr>
+          </a:lnRef>
+          <a:fillRef idx="1">
+            <a:schemeClr val="accent1"/>
+          </a:fillRef>
+          <a:effectRef idx="0">
+            <a:schemeClr val="accent1"/>
+          </a:effectRef>
+          <a:fontRef idx="minor">
+            <a:schemeClr val="lt1"/>
+          </a:fontRef>
+        </p:style>
+        <p:txBody>
+          <a:bodyPr rtlCol="0" anchor="ctr"/>
+          <a:lstStyle/>
+          <a:p>
+            <a:pPr algn="ctr"/>
+            <a:endParaRPr lang="en-SE"/>
+          </a:p>
+        </p:txBody>
+      </p:sp>
+      <p:sp>
+        <p:nvSpPr>
+          <p:cNvPr id="10" name="Rectangle: Rounded Corners 9">
+            <a:extLst>
+              <a:ext uri="{FF2B5EF4-FFF2-40B4-BE49-F238E27FC236}">
+                <a16:creationId xmlns:a16="http://schemas.microsoft.com/office/drawing/2014/main" id="{1CCC58E7-7282-FD56-E454-66C5E99F52F2}"/>
+              </a:ext>
+            </a:extLst>
+          </p:cNvPr>
+          <p:cNvSpPr/>
+          <p:nvPr/>
+        </p:nvSpPr>
+        <p:spPr>
+          <a:xfrm>
+            <a:off x="2200275" y="428625"/>
+            <a:ext cx="920026" cy="914400"/>
+          </a:xfrm>
+          <a:prstGeom prst="roundRect">
+            <a:avLst/>
+          </a:prstGeom>
+          <a:solidFill>
+            <a:srgbClr val="FFFFFF"/>
+          </a:solidFill>
+          <a:ln>
+            <a:noFill/>
+          </a:ln>
+        </p:spPr>
+        <p:style>
+          <a:lnRef idx="2">
+            <a:schemeClr val="accent1">
+              <a:shade val="15000"/>
+            </a:schemeClr>
+          </a:lnRef>
+          <a:fillRef idx="1">
+            <a:schemeClr val="accent1"/>
+          </a:fillRef>
+          <a:effectRef idx="0">
+            <a:schemeClr val="accent1"/>
+          </a:effectRef>
+          <a:fontRef idx="minor">
+            <a:schemeClr val="lt1"/>
+          </a:fontRef>
+        </p:style>
+        <p:txBody>
+          <a:bodyPr rtlCol="0" anchor="ctr"/>
+          <a:lstStyle/>
+          <a:p>
+            <a:pPr algn="ctr"/>
+            <a:endParaRPr lang="en-SE"/>
+          </a:p>
+        </p:txBody>
+      </p:sp>
+      <p:sp>
+        <p:nvSpPr>
+          <p:cNvPr id="11" name="Rectangle: Rounded Corners 10">
+            <a:extLst>
+              <a:ext uri="{FF2B5EF4-FFF2-40B4-BE49-F238E27FC236}">
+                <a16:creationId xmlns:a16="http://schemas.microsoft.com/office/drawing/2014/main" id="{47405F33-FD0F-47B3-2587-54459381EDD9}"/>
+              </a:ext>
+            </a:extLst>
+          </p:cNvPr>
+          <p:cNvSpPr/>
+          <p:nvPr/>
+        </p:nvSpPr>
+        <p:spPr>
+          <a:xfrm>
+            <a:off x="3219450" y="428625"/>
+            <a:ext cx="920026" cy="914400"/>
+          </a:xfrm>
+          <a:prstGeom prst="roundRect">
+            <a:avLst/>
+          </a:prstGeom>
+          <a:solidFill>
+            <a:srgbClr val="FFFFFF"/>
+          </a:solidFill>
+          <a:ln>
+            <a:noFill/>
+          </a:ln>
+        </p:spPr>
+        <p:style>
+          <a:lnRef idx="2">
+            <a:schemeClr val="accent1">
+              <a:shade val="15000"/>
+            </a:schemeClr>
+          </a:lnRef>
+          <a:fillRef idx="1">
+            <a:schemeClr val="accent1"/>
+          </a:fillRef>
+          <a:effectRef idx="0">
+            <a:schemeClr val="accent1"/>
+          </a:effectRef>
+          <a:fontRef idx="minor">
+            <a:schemeClr val="lt1"/>
+          </a:fontRef>
+        </p:style>
+        <p:txBody>
+          <a:bodyPr rtlCol="0" anchor="ctr"/>
+          <a:lstStyle/>
+          <a:p>
+            <a:pPr algn="ctr"/>
+            <a:endParaRPr lang="en-SE"/>
+          </a:p>
+        </p:txBody>
+      </p:sp>
+      <p:sp>
+        <p:nvSpPr>
+          <p:cNvPr id="12" name="Rectangle: Rounded Corners 11">
+            <a:extLst>
+              <a:ext uri="{FF2B5EF4-FFF2-40B4-BE49-F238E27FC236}">
+                <a16:creationId xmlns:a16="http://schemas.microsoft.com/office/drawing/2014/main" id="{AAFC7E33-D819-6F1F-C512-78769358B8F7}"/>
+              </a:ext>
+            </a:extLst>
+          </p:cNvPr>
+          <p:cNvSpPr/>
+          <p:nvPr/>
+        </p:nvSpPr>
+        <p:spPr>
+          <a:xfrm>
+            <a:off x="161925" y="1676400"/>
+            <a:ext cx="920026" cy="914400"/>
+          </a:xfrm>
+          <a:prstGeom prst="roundRect">
+            <a:avLst/>
+          </a:prstGeom>
+          <a:solidFill>
+            <a:srgbClr val="FFFFFF"/>
+          </a:solidFill>
+          <a:ln>
+            <a:noFill/>
+          </a:ln>
+        </p:spPr>
+        <p:style>
+          <a:lnRef idx="2">
+            <a:schemeClr val="accent1">
+              <a:shade val="15000"/>
+            </a:schemeClr>
+          </a:lnRef>
+          <a:fillRef idx="1">
+            <a:schemeClr val="accent1"/>
+          </a:fillRef>
+          <a:effectRef idx="0">
+            <a:schemeClr val="accent1"/>
+          </a:effectRef>
+          <a:fontRef idx="minor">
+            <a:schemeClr val="lt1"/>
+          </a:fontRef>
+        </p:style>
+        <p:txBody>
+          <a:bodyPr rtlCol="0" anchor="ctr"/>
+          <a:lstStyle/>
+          <a:p>
+            <a:pPr algn="ctr"/>
+            <a:endParaRPr lang="en-SE"/>
+          </a:p>
+        </p:txBody>
+      </p:sp>
+      <p:sp>
+        <p:nvSpPr>
+          <p:cNvPr id="13" name="Rectangle: Rounded Corners 12">
+            <a:extLst>
+              <a:ext uri="{FF2B5EF4-FFF2-40B4-BE49-F238E27FC236}">
+                <a16:creationId xmlns:a16="http://schemas.microsoft.com/office/drawing/2014/main" id="{1BEB1FCC-0605-CCB8-FCC2-F243BE81FE92}"/>
+              </a:ext>
+            </a:extLst>
+          </p:cNvPr>
+          <p:cNvSpPr/>
+          <p:nvPr/>
+        </p:nvSpPr>
+        <p:spPr>
+          <a:xfrm>
+            <a:off x="1181100" y="1676400"/>
+            <a:ext cx="920026" cy="914400"/>
+          </a:xfrm>
+          <a:prstGeom prst="roundRect">
+            <a:avLst/>
+          </a:prstGeom>
+          <a:solidFill>
+            <a:srgbClr val="FFFFFF"/>
+          </a:solidFill>
+          <a:ln>
+            <a:noFill/>
+          </a:ln>
+        </p:spPr>
+        <p:style>
+          <a:lnRef idx="2">
+            <a:schemeClr val="accent1">
+              <a:shade val="15000"/>
+            </a:schemeClr>
+          </a:lnRef>
+          <a:fillRef idx="1">
+            <a:schemeClr val="accent1"/>
+          </a:fillRef>
+          <a:effectRef idx="0">
+            <a:schemeClr val="accent1"/>
+          </a:effectRef>
+          <a:fontRef idx="minor">
+            <a:schemeClr val="lt1"/>
+          </a:fontRef>
+        </p:style>
+        <p:txBody>
+          <a:bodyPr rtlCol="0" anchor="ctr"/>
+          <a:lstStyle/>
+          <a:p>
+            <a:pPr algn="ctr"/>
+            <a:endParaRPr lang="en-SE"/>
+          </a:p>
+        </p:txBody>
+      </p:sp>
+      <p:sp>
+        <p:nvSpPr>
+          <p:cNvPr id="14" name="Rectangle: Rounded Corners 13">
+            <a:extLst>
+              <a:ext uri="{FF2B5EF4-FFF2-40B4-BE49-F238E27FC236}">
+                <a16:creationId xmlns:a16="http://schemas.microsoft.com/office/drawing/2014/main" id="{AD39C582-2955-B913-1E03-89D3A3C1A1C7}"/>
+              </a:ext>
+            </a:extLst>
+          </p:cNvPr>
+          <p:cNvSpPr/>
+          <p:nvPr/>
+        </p:nvSpPr>
+        <p:spPr>
+          <a:xfrm>
+            <a:off x="2200275" y="1676400"/>
+            <a:ext cx="920026" cy="914400"/>
+          </a:xfrm>
+          <a:prstGeom prst="roundRect">
+            <a:avLst/>
+          </a:prstGeom>
+          <a:solidFill>
+            <a:srgbClr val="FFFFFF"/>
+          </a:solidFill>
+          <a:ln>
+            <a:noFill/>
+          </a:ln>
+        </p:spPr>
+        <p:style>
+          <a:lnRef idx="2">
+            <a:schemeClr val="accent1">
+              <a:shade val="15000"/>
+            </a:schemeClr>
+          </a:lnRef>
+          <a:fillRef idx="1">
+            <a:schemeClr val="accent1"/>
+          </a:fillRef>
+          <a:effectRef idx="0">
+            <a:schemeClr val="accent1"/>
+          </a:effectRef>
+          <a:fontRef idx="minor">
+            <a:schemeClr val="lt1"/>
+          </a:fontRef>
+        </p:style>
+        <p:txBody>
+          <a:bodyPr rtlCol="0" anchor="ctr"/>
+          <a:lstStyle/>
+          <a:p>
+            <a:pPr algn="ctr"/>
+            <a:endParaRPr lang="en-SE"/>
+          </a:p>
+        </p:txBody>
+      </p:sp>
+      <p:sp>
+        <p:nvSpPr>
+          <p:cNvPr id="15" name="Rectangle: Rounded Corners 14">
+            <a:extLst>
+              <a:ext uri="{FF2B5EF4-FFF2-40B4-BE49-F238E27FC236}">
+                <a16:creationId xmlns:a16="http://schemas.microsoft.com/office/drawing/2014/main" id="{7CF83176-637F-0E98-B9D6-2E62DA2474F1}"/>
+              </a:ext>
+            </a:extLst>
+          </p:cNvPr>
+          <p:cNvSpPr/>
+          <p:nvPr/>
+        </p:nvSpPr>
+        <p:spPr>
+          <a:xfrm>
+            <a:off x="3219450" y="1676400"/>
+            <a:ext cx="920026" cy="914400"/>
+          </a:xfrm>
+          <a:prstGeom prst="roundRect">
+            <a:avLst/>
+          </a:prstGeom>
+          <a:solidFill>
+            <a:srgbClr val="FFFFFF"/>
+          </a:solidFill>
+          <a:ln>
+            <a:noFill/>
+          </a:ln>
+        </p:spPr>
+        <p:style>
+          <a:lnRef idx="2">
+            <a:schemeClr val="accent1">
+              <a:shade val="15000"/>
+            </a:schemeClr>
+          </a:lnRef>
+          <a:fillRef idx="1">
+            <a:schemeClr val="accent1"/>
+          </a:fillRef>
+          <a:effectRef idx="0">
+            <a:schemeClr val="accent1"/>
+          </a:effectRef>
+          <a:fontRef idx="minor">
+            <a:schemeClr val="lt1"/>
+          </a:fontRef>
+        </p:style>
+        <p:txBody>
+          <a:bodyPr rtlCol="0" anchor="ctr"/>
+          <a:lstStyle/>
+          <a:p>
+            <a:pPr algn="ctr"/>
+            <a:endParaRPr lang="en-SE"/>
+          </a:p>
+        </p:txBody>
+      </p:sp>
+    </p:spTree>
+    <p:extLst>
+      <p:ext uri="{BB962C8B-B14F-4D97-AF65-F5344CB8AC3E}">
         <p14:creationId xmlns:p14="http://schemas.microsoft.com/office/powerpoint/2010/main" val="481644452"/>
       </p:ext>
     </p:extLst>
@@ -5427,7 +5536,7 @@
 </p:sld>
 </file>
 
-<file path=ppt/slides/slide8.xml><?xml version="1.0" encoding="utf-8"?>
+<file path=ppt/slides/slide9.xml><?xml version="1.0" encoding="utf-8"?>
 <p:sld xmlns:a="http://schemas.openxmlformats.org/drawingml/2006/main" xmlns:r="http://schemas.openxmlformats.org/officeDocument/2006/relationships" xmlns:p="http://schemas.openxmlformats.org/presentationml/2006/main">
   <p:cSld>
     <p:spTree>
